--- a/docs/교재/통합반_오프라인/01회차/통합반_오프라인_01회차.pptx
+++ b/docs/교재/통합반_오프라인/01회차/통합반_오프라인_01회차.pptx
@@ -2571,7 +2571,7 @@
           <a:lstStyle/>
           <a:p>
             <a:r>
-              <a:t>판단에 쓰인 정보가 어디에 있었는지를 보겠습니다. 센서 값은 값을 시간 순서로 쌓는 저장소인 TimescaleDB에, 운전 상태는 설비를 제어하는 PLC의 상태 메시지에, 원인 후보와 조치 방법은 설비 매뉴얼에, 생산 일정은 MES에 있습니다. 센서 값과 운전 상태는 매초 바뀌는 값이고, 생산 계획과 실적을 관리하는 MES에는 긴급 오더의 납기가 약 6시간 남았다고 기록되어 있었습니다. 그림의 점선은 이들이 이어져 있지 않다는 뜻입니다.</a:t>
+              <a:t>판단에 쓰인 정보가 어디에 있었는지를 보겠습니다. 센서 값은 값을 시간 순서로 쌓는 저장소, 곧 시계열 DB인 TimescaleDB에, 운전 상태는 설비를 제어하는 PLC의 상태 메시지에, 원인 후보와 조치 방법은 설비 매뉴얼에, 생산 일정은 MES에 있습니다. 센서 값과 운전 상태는 매초 바뀌는 값이고, 생산 계획과 실적을 관리하는 MES에는 긴급 오더의 납기가 약 6시간 남았다고 기록되어 있었습니다. 그림의 점선은 이들이 이어져 있지 않다는 뜻입니다.</a:t>
             </a:r>
           </a:p>
         </p:txBody>
@@ -6365,7 +6365,7 @@
       </p:sp>
       <p:pic>
         <p:nvPicPr>
-          <p:cNvPr id="6" name="삽화:흩어진정보.svg" descr="illust_8158643243127325195_1791712364.png"/>
+          <p:cNvPr id="6" name="삽화:흩어진정보.svg" descr="illust_2820395370888582078_1791712364.png"/>
           <p:cNvPicPr>
             <a:picLocks noChangeAspect="1"/>
           </p:cNvPicPr>
@@ -6445,7 +6445,7 @@
                 <a:ea typeface="맑은 고딕"/>
                 <a:cs typeface="맑은 고딕"/>
               </a:rPr>
-              <a:t>지금의 센서 값</a:t>
+              <a:t>시계열 DB · 지금의 센서 값</a:t>
             </a:r>
           </a:p>
           <a:p>
@@ -11158,7 +11158,7 @@
       </p:sp>
       <p:pic>
         <p:nvPicPr>
-          <p:cNvPr id="6" name="삽화:노드관계.svg" descr="illust_630259993101790866_1791712364.png"/>
+          <p:cNvPr id="6" name="삽화:노드관계.svg" descr="illust_5731950713445845678_1791712364.png"/>
           <p:cNvPicPr>
             <a:picLocks noChangeAspect="1"/>
           </p:cNvPicPr>
@@ -11754,7 +11754,7 @@
       </p:sp>
       <p:pic>
         <p:nvPicPr>
-          <p:cNvPr id="6" name="삽화:관계.svg" descr="illust_154322381299471219_1791712364.png"/>
+          <p:cNvPr id="6" name="삽화:관계.svg" descr="illust_5161723703587641567_1791712364.png"/>
           <p:cNvPicPr>
             <a:picLocks noChangeAspect="1"/>
           </p:cNvPicPr>
@@ -15450,7 +15450,7 @@
       </p:sp>
       <p:pic>
         <p:nvPicPr>
-          <p:cNvPr id="6" name="삽화:유형과대상_0.svg" descr="illust_7659406353868737932_1791717240.png"/>
+          <p:cNvPr id="6" name="삽화:유형과대상_0.svg" descr="illust_6150404816127298328_1791717240.png"/>
           <p:cNvPicPr>
             <a:picLocks noChangeAspect="1"/>
           </p:cNvPicPr>
@@ -16906,7 +16906,7 @@
       </p:sp>
       <p:pic>
         <p:nvPicPr>
-          <p:cNvPr id="6" name="삽화:설비클래스_0.svg" descr="illust_6145933500614744448_1791717240.png"/>
+          <p:cNvPr id="6" name="삽화:설비클래스_0.svg" descr="illust_1277295753431594123_1791717240.png"/>
           <p:cNvPicPr>
             <a:picLocks noChangeAspect="1"/>
           </p:cNvPicPr>
@@ -19239,7 +19239,7 @@
       </p:sp>
       <p:pic>
         <p:nvPicPr>
-          <p:cNvPr id="6" name="삽화:속성_3.svg" descr="illust_5358443076979408887_1791717240.png"/>
+          <p:cNvPr id="6" name="삽화:속성_3.svg" descr="illust_5181969145690488328_1791717240.png"/>
           <p:cNvPicPr>
             <a:picLocks noChangeAspect="1"/>
           </p:cNvPicPr>
@@ -33761,7 +33761,7 @@
       </p:sp>
       <p:pic>
         <p:nvPicPr>
-          <p:cNvPr id="6" name="삽화:원인후보.svg" descr="illust_828175779983073120_1791712364.png"/>
+          <p:cNvPr id="6" name="삽화:원인후보.svg" descr="illust_8861123188898066181_1791712364.png"/>
           <p:cNvPicPr>
             <a:picLocks noChangeAspect="1"/>
           </p:cNvPicPr>

--- a/docs/교재/통합반_오프라인/01회차/통합반_오프라인_01회차.pptx
+++ b/docs/교재/통합반_오프라인/01회차/통합반_오프라인_01회차.pptx
@@ -6365,7 +6365,7 @@
       </p:sp>
       <p:pic>
         <p:nvPicPr>
-          <p:cNvPr id="6" name="삽화:흩어진정보.svg" descr="illust_2820395370888582078_1791712364.png"/>
+          <p:cNvPr id="6" name="삽화:흩어진정보.svg" descr="illust_3944455162524707313_1791712364.png"/>
           <p:cNvPicPr>
             <a:picLocks noChangeAspect="1"/>
           </p:cNvPicPr>
@@ -6669,7 +6669,7 @@
         <p:spPr>
           <a:xfrm>
             <a:off x="7743181" y="5244129"/>
-            <a:ext cx="3709228" cy="1026668"/>
+            <a:ext cx="3709228" cy="980185"/>
           </a:xfrm>
           <a:prstGeom prst="rect">
             <a:avLst/>
@@ -6697,7 +6697,28 @@
                 <a:ea typeface="맑은 고딕"/>
                 <a:cs typeface="맑은 고딕"/>
               </a:rPr>
-              <a:t>MES(Manufacturing Execution System)</a:t>
+              <a:t>MES</a:t>
+            </a:r>
+          </a:p>
+          <a:p>
+            <a:pPr algn="ctr">
+              <a:lnSpc>
+                <a:spcPct val="110000"/>
+              </a:lnSpc>
+              <a:spcAft>
+                <a:spcPts val="100"/>
+              </a:spcAft>
+            </a:pPr>
+            <a:r>
+              <a:rPr sz="1300" b="0">
+                <a:solidFill>
+                  <a:srgbClr val="556175"/>
+                </a:solidFill>
+                <a:latin typeface="맑은 고딕"/>
+                <a:ea typeface="맑은 고딕"/>
+                <a:cs typeface="맑은 고딕"/>
+              </a:rPr>
+              <a:t>Manufacturing Execution System</a:t>
             </a:r>
           </a:p>
           <a:p>
@@ -11158,7 +11179,7 @@
       </p:sp>
       <p:pic>
         <p:nvPicPr>
-          <p:cNvPr id="6" name="삽화:노드관계.svg" descr="illust_5731950713445845678_1791712364.png"/>
+          <p:cNvPr id="6" name="삽화:노드관계.svg" descr="illust_690732289733238958_1791712364.png"/>
           <p:cNvPicPr>
             <a:picLocks noChangeAspect="1"/>
           </p:cNvPicPr>
@@ -11754,7 +11775,7 @@
       </p:sp>
       <p:pic>
         <p:nvPicPr>
-          <p:cNvPr id="6" name="삽화:관계.svg" descr="illust_5161723703587641567_1791712364.png"/>
+          <p:cNvPr id="6" name="삽화:관계.svg" descr="illust_1171217827023703655_1791712364.png"/>
           <p:cNvPicPr>
             <a:picLocks noChangeAspect="1"/>
           </p:cNvPicPr>
@@ -15450,7 +15471,7 @@
       </p:sp>
       <p:pic>
         <p:nvPicPr>
-          <p:cNvPr id="6" name="삽화:유형과대상_0.svg" descr="illust_6150404816127298328_1791717240.png"/>
+          <p:cNvPr id="6" name="삽화:유형과대상_0.svg" descr="illust_7522196779095204137_1791717240.png"/>
           <p:cNvPicPr>
             <a:picLocks noChangeAspect="1"/>
           </p:cNvPicPr>
@@ -16906,7 +16927,7 @@
       </p:sp>
       <p:pic>
         <p:nvPicPr>
-          <p:cNvPr id="6" name="삽화:설비클래스_0.svg" descr="illust_1277295753431594123_1791717240.png"/>
+          <p:cNvPr id="6" name="삽화:설비클래스_0.svg" descr="illust_8871237533882735027_1791717240.png"/>
           <p:cNvPicPr>
             <a:picLocks noChangeAspect="1"/>
           </p:cNvPicPr>
@@ -19239,7 +19260,7 @@
       </p:sp>
       <p:pic>
         <p:nvPicPr>
-          <p:cNvPr id="6" name="삽화:속성_3.svg" descr="illust_5181969145690488328_1791717240.png"/>
+          <p:cNvPr id="6" name="삽화:속성_3.svg" descr="illust_5363736602514844515_1791717240.png"/>
           <p:cNvPicPr>
             <a:picLocks noChangeAspect="1"/>
           </p:cNvPicPr>
@@ -33761,7 +33782,7 @@
       </p:sp>
       <p:pic>
         <p:nvPicPr>
-          <p:cNvPr id="6" name="삽화:원인후보.svg" descr="illust_8861123188898066181_1791712364.png"/>
+          <p:cNvPr id="6" name="삽화:원인후보.svg" descr="illust_4276806774344571304_1791712364.png"/>
           <p:cNvPicPr>
             <a:picLocks noChangeAspect="1"/>
           </p:cNvPicPr>

--- a/docs/교재/통합반_오프라인/01회차/통합반_오프라인_01회차.pptx
+++ b/docs/교재/통합반_오프라인/01회차/통합반_오프라인_01회차.pptx
@@ -1311,7 +1311,7 @@
           <a:lstStyle/>
           <a:p>
             <a:r>
-              <a:t>유압 설비 HYD-01에서 쿨러의 냉각 성능이 떨어져 유온 TS1이 오른 사건을 저장된 값으로 보겠습니다. 위가 유온, 아래가 냉각 효율입니다. 경보는 11시 13분 8초에 났는데 조치는 108초 뒤에 승인되었고, 그동안 유온은 61.8 ℃까지 올랐습니다. 경보는 조건을 벗어났다는 사실만 알리기 때문입니다. 비유 제안: 체온계의 고열 표시. 닮은 점은 열이 난다는 사실은 바로 알지만 어떤 병인지는 진찰해야 안다는 것이고, 다른 점은 이 사건에서는 응급 조치를 고르는 데에도 원인 판단이 먼저 필요했다는 것입니다.</a:t>
+              <a:t>유압 설비 HYD-01에서 쿨러의 냉각 성능이 떨어져 유온 TS1이 오른 사건을 저장된 값으로 보겠습니다. 위가 유온, 아래가 냉각 효율입니다. 경보는 11시 13분 8초에 났는데 조치는 108초 뒤에 승인되었고, 그동안 유온은 61.8 ℃까지 올랐습니다. 경보는 조건을 벗어났다는 사실만 알리기 때문입니다. 체온계의 고열 표시에 견줄 수 있습니다. 열이 난다는 사실은 바로 알지만 어떤 병인지는 진찰해야 안다는 점이 닮았고, 이 사건에서는 응급 조치를 고르는 데에도 원인 판단이 먼저 필요했다는 점은 다릅니다.</a:t>
             </a:r>
           </a:p>
         </p:txBody>
@@ -2501,7 +2501,7 @@
           <a:lstStyle/>
           <a:p>
             <a:r>
-              <a:t>지금까지 모자랐던 것을 세 낱말로 나누어 보겠습니다. 수치 그대로가 데이터, 의미가 붙은 것이 정보, 다른 대상과 이어져 판단에 쓸 수 있는 것이 지식입니다. 비유 제안: 병원의 검사 수치, 정상 범위를 벗어났다는 표시, 의사의 진단. 닮은 점은 수치와 진단이 별개의 일이라는 것이고, 다른 점은 설비에서는 조치를 정할 때 생산 일정까지 함께 따진다는 것입니다.</a:t>
+              <a:t>지금까지 모자랐던 것을 세 낱말로 나누어 보겠습니다. 수치 그대로가 데이터, 의미가 붙은 것이 정보, 다른 대상과 이어져 판단에 쓸 수 있는 것이 지식입니다. 병원으로 치면 검사 수치, 정상 범위를 벗어났다는 표시, 의사의 진단에 해당합니다. 수치와 진단이 별개의 일이라는 점이 닮았고, 설비에서는 조치를 정할 때 생산 일정까지 함께 따진다는 점은 다릅니다.</a:t>
             </a:r>
           </a:p>
         </p:txBody>
@@ -6365,7 +6365,7 @@
       </p:sp>
       <p:pic>
         <p:nvPicPr>
-          <p:cNvPr id="6" name="삽화:흩어진정보.svg" descr="illust_3944455162524707313_1791712364.png"/>
+          <p:cNvPr id="6" name="삽화:흩어진정보.svg" descr="illust_64392409065363445_1791712364.png"/>
           <p:cNvPicPr>
             <a:picLocks noChangeAspect="1"/>
           </p:cNvPicPr>
@@ -10646,7 +10646,7 @@
                 <a:ea typeface="맑은 고딕"/>
                 <a:cs typeface="맑은 고딕"/>
               </a:rPr>
-              <a:t>• HYD는 Neo4j를 쓴다</a:t>
+              <a:t>• HYD는 Neo4j를 쓰고, 질의 언어 Cypher로 조회한다</a:t>
             </a:r>
           </a:p>
         </p:txBody>
@@ -11179,7 +11179,7 @@
       </p:sp>
       <p:pic>
         <p:nvPicPr>
-          <p:cNvPr id="6" name="삽화:노드관계.svg" descr="illust_690732289733238958_1791712364.png"/>
+          <p:cNvPr id="6" name="삽화:노드관계.svg" descr="illust_7286183024642994099_1791712364.png"/>
           <p:cNvPicPr>
             <a:picLocks noChangeAspect="1"/>
           </p:cNvPicPr>
@@ -11775,7 +11775,7 @@
       </p:sp>
       <p:pic>
         <p:nvPicPr>
-          <p:cNvPr id="6" name="삽화:관계.svg" descr="illust_1171217827023703655_1791712364.png"/>
+          <p:cNvPr id="6" name="삽화:관계.svg" descr="illust_5115784587173779694_1791712364.png"/>
           <p:cNvPicPr>
             <a:picLocks noChangeAspect="1"/>
           </p:cNvPicPr>
@@ -15471,7 +15471,7 @@
       </p:sp>
       <p:pic>
         <p:nvPicPr>
-          <p:cNvPr id="6" name="삽화:유형과대상_0.svg" descr="illust_7522196779095204137_1791717240.png"/>
+          <p:cNvPr id="6" name="삽화:유형과대상_0.svg" descr="illust_6590899141346930245_1791717240.png"/>
           <p:cNvPicPr>
             <a:picLocks noChangeAspect="1"/>
           </p:cNvPicPr>
@@ -16927,7 +16927,7 @@
       </p:sp>
       <p:pic>
         <p:nvPicPr>
-          <p:cNvPr id="6" name="삽화:설비클래스_0.svg" descr="illust_8871237533882735027_1791717240.png"/>
+          <p:cNvPr id="6" name="삽화:설비클래스_0.svg" descr="illust_3039179120977785386_1791717240.png"/>
           <p:cNvPicPr>
             <a:picLocks noChangeAspect="1"/>
           </p:cNvPicPr>
@@ -19260,7 +19260,7 @@
       </p:sp>
       <p:pic>
         <p:nvPicPr>
-          <p:cNvPr id="6" name="삽화:속성_3.svg" descr="illust_5363736602514844515_1791717240.png"/>
+          <p:cNvPr id="6" name="삽화:속성_3.svg" descr="illust_6009628050015976992_1791717240.png"/>
           <p:cNvPicPr>
             <a:picLocks noChangeAspect="1"/>
           </p:cNvPicPr>
@@ -21112,7 +21112,7 @@
                 <a:ea typeface="맑은 고딕"/>
                 <a:cs typeface="맑은 고딕"/>
               </a:rPr>
-              <a:t>이 실습을 마치면 쿨러, 센서, 부품, 고장 유형, 조치가 이름과 방향이 있는 관계로 이어진 그림 한 장이 만들어진다.</a:t>
+              <a:t>쿨러, 센서, 부품, 고장 유형, 조치를 이름과 방향이 있는 관계로 이은 그림 한 장이 이 실습의 결과물이다.</a:t>
             </a:r>
           </a:p>
         </p:txBody>
@@ -33782,7 +33782,7 @@
       </p:sp>
       <p:pic>
         <p:nvPicPr>
-          <p:cNvPr id="6" name="삽화:원인후보.svg" descr="illust_4276806774344571304_1791712364.png"/>
+          <p:cNvPr id="6" name="삽화:원인후보.svg" descr="illust_8162663429170555394_1791712364.png"/>
           <p:cNvPicPr>
             <a:picLocks noChangeAspect="1"/>
           </p:cNvPicPr>

--- a/docs/교재/통합반_오프라인/01회차/통합반_오프라인_01회차.pptx
+++ b/docs/교재/통합반_오프라인/01회차/통합반_오프라인_01회차.pptx
@@ -6365,7 +6365,7 @@
       </p:sp>
       <p:pic>
         <p:nvPicPr>
-          <p:cNvPr id="6" name="삽화:흩어진정보.svg" descr="illust_64392409065363445_1791712364.png"/>
+          <p:cNvPr id="6" name="삽화:흩어진정보.svg" descr="illust_9131362737099128264_1791712364.png"/>
           <p:cNvPicPr>
             <a:picLocks noChangeAspect="1"/>
           </p:cNvPicPr>
@@ -11179,7 +11179,7 @@
       </p:sp>
       <p:pic>
         <p:nvPicPr>
-          <p:cNvPr id="6" name="삽화:노드관계.svg" descr="illust_7286183024642994099_1791712364.png"/>
+          <p:cNvPr id="6" name="삽화:노드관계.svg" descr="illust_4577101000910598477_1791712364.png"/>
           <p:cNvPicPr>
             <a:picLocks noChangeAspect="1"/>
           </p:cNvPicPr>
@@ -11775,7 +11775,7 @@
       </p:sp>
       <p:pic>
         <p:nvPicPr>
-          <p:cNvPr id="6" name="삽화:관계.svg" descr="illust_5115784587173779694_1791712364.png"/>
+          <p:cNvPr id="6" name="삽화:관계.svg" descr="illust_7562590323663377866_1791712364.png"/>
           <p:cNvPicPr>
             <a:picLocks noChangeAspect="1"/>
           </p:cNvPicPr>
@@ -15471,7 +15471,7 @@
       </p:sp>
       <p:pic>
         <p:nvPicPr>
-          <p:cNvPr id="6" name="삽화:유형과대상_0.svg" descr="illust_6590899141346930245_1791717240.png"/>
+          <p:cNvPr id="6" name="삽화:유형과대상_0.svg" descr="illust_9017215984867077671_1791717240.png"/>
           <p:cNvPicPr>
             <a:picLocks noChangeAspect="1"/>
           </p:cNvPicPr>
@@ -16927,7 +16927,7 @@
       </p:sp>
       <p:pic>
         <p:nvPicPr>
-          <p:cNvPr id="6" name="삽화:설비클래스_0.svg" descr="illust_3039179120977785386_1791717240.png"/>
+          <p:cNvPr id="6" name="삽화:설비클래스_0.svg" descr="illust_3718050199112135329_1791717240.png"/>
           <p:cNvPicPr>
             <a:picLocks noChangeAspect="1"/>
           </p:cNvPicPr>
@@ -19260,7 +19260,7 @@
       </p:sp>
       <p:pic>
         <p:nvPicPr>
-          <p:cNvPr id="6" name="삽화:속성_3.svg" descr="illust_6009628050015976992_1791717240.png"/>
+          <p:cNvPr id="6" name="삽화:속성_3.svg" descr="illust_2556164387737879798_1791717240.png"/>
           <p:cNvPicPr>
             <a:picLocks noChangeAspect="1"/>
           </p:cNvPicPr>
@@ -28340,7 +28340,7 @@
                 <a:ea typeface="맑은 고딕"/>
                 <a:cs typeface="맑은 고딕"/>
               </a:rPr>
-              <a:t>배운 내용을 바탕으로 정답을 맞춰보세요.</a:t>
+              <a:t>배운 내용을 바탕으로 정답을 맞혀 보세요.</a:t>
             </a:r>
           </a:p>
         </p:txBody>
@@ -33782,7 +33782,7 @@
       </p:sp>
       <p:pic>
         <p:nvPicPr>
-          <p:cNvPr id="6" name="삽화:원인후보.svg" descr="illust_8162663429170555394_1791712364.png"/>
+          <p:cNvPr id="6" name="삽화:원인후보.svg" descr="illust_1221699521643203557_1791712364.png"/>
           <p:cNvPicPr>
             <a:picLocks noChangeAspect="1"/>
           </p:cNvPicPr>

--- a/docs/교재/통합반_오프라인/01회차/통합반_오프라인_01회차.pptx
+++ b/docs/교재/통합반_오프라인/01회차/통합반_오프라인_01회차.pptx
@@ -1731,7 +1731,7 @@
           <a:lstStyle/>
           <a:p>
             <a:r>
-              <a:t>앞 실습에서 그린 관계도를 같은 기준의 파일로 옮기는 실습입니다. 목록의 항목마다 클래스인지 인스턴스인지를 가리고, 인스턴스를 서로 구별할 식별자를 정합니다. 정한 내용을 Claude Code에 요구사항으로 전달해 파일을 만들게 하고, 만들어진 파일이 관계도와 같은 뜻인지 견줍니다. 무엇을 클래스로 두고 무엇을 인스턴스로 둘지를 정하는 일은 설계하는 사람의 몫입니다.</a:t>
+              <a:t>앞 실습에서 그린 관계도를 같은 기준의 파일로 옮기는 실습입니다. 목록의 항목마다 클래스인지 인스턴스인지를 가리고, 인스턴스를 서로 구별할 식별자를 정합니다. 정한 내용을 AI에게 요구사항으로 전달해 바이브 코딩으로 파일을 만들고, 만들어진 파일이 관계도와 같은 뜻인지 견줍니다. 무엇을 클래스로 두고 무엇을 인스턴스로 둘지를 정하는 일은 설계하는 사람의 몫입니다.</a:t>
             </a:r>
           </a:p>
         </p:txBody>
@@ -6365,7 +6365,7 @@
       </p:sp>
       <p:pic>
         <p:nvPicPr>
-          <p:cNvPr id="6" name="삽화:흩어진정보.svg" descr="illust_9131362737099128264_1791712364.png"/>
+          <p:cNvPr id="6" name="삽화:흩어진정보.svg" descr="illust_4586282239143760_1791712364.png"/>
           <p:cNvPicPr>
             <a:picLocks noChangeAspect="1"/>
           </p:cNvPicPr>
@@ -11179,7 +11179,7 @@
       </p:sp>
       <p:pic>
         <p:nvPicPr>
-          <p:cNvPr id="6" name="삽화:노드관계.svg" descr="illust_4577101000910598477_1791712364.png"/>
+          <p:cNvPr id="6" name="삽화:노드관계.svg" descr="illust_7213179085748974910_1791712364.png"/>
           <p:cNvPicPr>
             <a:picLocks noChangeAspect="1"/>
           </p:cNvPicPr>
@@ -11775,7 +11775,7 @@
       </p:sp>
       <p:pic>
         <p:nvPicPr>
-          <p:cNvPr id="6" name="삽화:관계.svg" descr="illust_7562590323663377866_1791712364.png"/>
+          <p:cNvPr id="6" name="삽화:관계.svg" descr="illust_5869298148102865872_1791712364.png"/>
           <p:cNvPicPr>
             <a:picLocks noChangeAspect="1"/>
           </p:cNvPicPr>
@@ -15471,7 +15471,7 @@
       </p:sp>
       <p:pic>
         <p:nvPicPr>
-          <p:cNvPr id="6" name="삽화:유형과대상_0.svg" descr="illust_9017215984867077671_1791717240.png"/>
+          <p:cNvPr id="6" name="삽화:유형과대상_0.svg" descr="illust_2477536602411205407_1791717240.png"/>
           <p:cNvPicPr>
             <a:picLocks noChangeAspect="1"/>
           </p:cNvPicPr>
@@ -16927,7 +16927,7 @@
       </p:sp>
       <p:pic>
         <p:nvPicPr>
-          <p:cNvPr id="6" name="삽화:설비클래스_0.svg" descr="illust_3718050199112135329_1791717240.png"/>
+          <p:cNvPr id="6" name="삽화:설비클래스_0.svg" descr="illust_7535935464537873851_1791717240.png"/>
           <p:cNvPicPr>
             <a:picLocks noChangeAspect="1"/>
           </p:cNvPicPr>
@@ -19260,7 +19260,7 @@
       </p:sp>
       <p:pic>
         <p:nvPicPr>
-          <p:cNvPr id="6" name="삽화:속성_3.svg" descr="illust_2556164387737879798_1791717240.png"/>
+          <p:cNvPr id="6" name="삽화:속성_3.svg" descr="illust_7473619268688602587_1791717240.png"/>
           <p:cNvPicPr>
             <a:picLocks noChangeAspect="1"/>
           </p:cNvPicPr>
@@ -33782,7 +33782,7 @@
       </p:sp>
       <p:pic>
         <p:nvPicPr>
-          <p:cNvPr id="6" name="삽화:원인후보.svg" descr="illust_1221699521643203557_1791712364.png"/>
+          <p:cNvPr id="6" name="삽화:원인후보.svg" descr="illust_3565215839905215536_1791712364.png"/>
           <p:cNvPicPr>
             <a:picLocks noChangeAspect="1"/>
           </p:cNvPicPr>
